--- a/assets/slides/AKurteva.pptx
+++ b/assets/slides/AKurteva.pptx
@@ -2998,7 +2998,7 @@
             <a:fld id="{8F866409-172B-5843-A412-BA0155B59A21}" type="datetimeFigureOut">
               <a:rPr lang="en-US" smtClean="0"/>
               <a:pPr/>
-              <a:t>9/13/26</a:t>
+              <a:t>9/15/26</a:t>
             </a:fld>
             <a:endParaRPr lang="en-US" dirty="0"/>
           </a:p>
@@ -3370,7 +3370,7 @@
           <a:p>
             <a:fld id="{EB16F4B0-7670-A44D-BAE0-37162A636656}" type="datetime1">
               <a:rPr lang="en-GB" smtClean="0"/>
-              <a:t>13/09/2026</a:t>
+              <a:t>15/09/2026</a:t>
             </a:fld>
             <a:endParaRPr lang="en-US"/>
           </a:p>
@@ -3538,7 +3538,7 @@
           <a:p>
             <a:fld id="{9D7F6C16-83D7-404D-975B-60ABB591A129}" type="datetime1">
               <a:rPr lang="en-GB" smtClean="0"/>
-              <a:t>13/09/2026</a:t>
+              <a:t>15/09/2026</a:t>
             </a:fld>
             <a:endParaRPr lang="en-US"/>
           </a:p>
@@ -3716,7 +3716,7 @@
           <a:p>
             <a:fld id="{AA984D76-AB48-2C4D-BD8F-11CB03098FE2}" type="datetime1">
               <a:rPr lang="en-GB" smtClean="0"/>
-              <a:t>13/09/2026</a:t>
+              <a:t>15/09/2026</a:t>
             </a:fld>
             <a:endParaRPr lang="en-US"/>
           </a:p>
@@ -3884,7 +3884,7 @@
           <a:p>
             <a:fld id="{4672112F-887B-554D-867B-A8798F935721}" type="datetime1">
               <a:rPr lang="en-GB" smtClean="0"/>
-              <a:t>13/09/2026</a:t>
+              <a:t>15/09/2026</a:t>
             </a:fld>
             <a:endParaRPr lang="en-US"/>
           </a:p>
@@ -4129,7 +4129,7 @@
           <a:p>
             <a:fld id="{E17CCF76-BD03-6B4A-A9A8-3C59849903A2}" type="datetime1">
               <a:rPr lang="en-GB" smtClean="0"/>
-              <a:t>13/09/2026</a:t>
+              <a:t>15/09/2026</a:t>
             </a:fld>
             <a:endParaRPr lang="en-US"/>
           </a:p>
@@ -4414,7 +4414,7 @@
           <a:p>
             <a:fld id="{923AC97B-A15C-E64F-BC28-27491365A865}" type="datetime1">
               <a:rPr lang="en-GB" smtClean="0"/>
-              <a:t>13/09/2026</a:t>
+              <a:t>15/09/2026</a:t>
             </a:fld>
             <a:endParaRPr lang="en-US"/>
           </a:p>
@@ -4833,7 +4833,7 @@
           <a:p>
             <a:fld id="{1FD84480-D8CF-1347-8105-547A4E1A3F87}" type="datetime1">
               <a:rPr lang="en-GB" smtClean="0"/>
-              <a:t>13/09/2026</a:t>
+              <a:t>15/09/2026</a:t>
             </a:fld>
             <a:endParaRPr lang="en-US"/>
           </a:p>
@@ -4950,7 +4950,7 @@
           <a:p>
             <a:fld id="{51323218-8414-9243-85C3-6CD6AA653BD7}" type="datetime1">
               <a:rPr lang="en-GB" smtClean="0"/>
-              <a:t>13/09/2026</a:t>
+              <a:t>15/09/2026</a:t>
             </a:fld>
             <a:endParaRPr lang="en-US"/>
           </a:p>
@@ -5045,7 +5045,7 @@
           <a:p>
             <a:fld id="{3996D829-A8AB-5D47-875B-8FAB596590D1}" type="datetime1">
               <a:rPr lang="en-GB" smtClean="0"/>
-              <a:t>13/09/2026</a:t>
+              <a:t>15/09/2026</a:t>
             </a:fld>
             <a:endParaRPr lang="en-US"/>
           </a:p>
@@ -5320,7 +5320,7 @@
           <a:p>
             <a:fld id="{ADB65961-8C72-C846-8877-2D8C0D75B156}" type="datetime1">
               <a:rPr lang="en-GB" smtClean="0"/>
-              <a:t>13/09/2026</a:t>
+              <a:t>15/09/2026</a:t>
             </a:fld>
             <a:endParaRPr lang="en-US"/>
           </a:p>
@@ -5572,7 +5572,7 @@
           <a:p>
             <a:fld id="{FE10995E-5FEF-7E4F-ACA8-65F56EBB98CE}" type="datetime1">
               <a:rPr lang="en-GB" smtClean="0"/>
-              <a:t>13/09/2026</a:t>
+              <a:t>15/09/2026</a:t>
             </a:fld>
             <a:endParaRPr lang="en-US"/>
           </a:p>
@@ -5784,7 +5784,7 @@
           <a:p>
             <a:fld id="{453D6F6C-47D1-EA4C-A55D-C7B0098AEB9A}" type="datetime1">
               <a:rPr lang="en-GB" smtClean="0"/>
-              <a:t>13/09/2026</a:t>
+              <a:t>15/09/2026</a:t>
             </a:fld>
             <a:endParaRPr lang="en-US" dirty="0"/>
           </a:p>
@@ -6317,18 +6317,11 @@
           <a:p>
             <a:pPr algn="l"/>
             <a:r>
-              <a:rPr lang="en-GB" sz="2000" i="1" dirty="0" err="1">
+              <a:rPr lang="en-GB" sz="2000" i="1" dirty="0">
                 <a:latin typeface="Times New Roman" panose="02020603050405020304" pitchFamily="18" charset="0"/>
                 <a:cs typeface="Times New Roman" panose="02020603050405020304" pitchFamily="18" charset="0"/>
               </a:rPr>
-              <a:t>Assit</a:t>
-            </a:r>
-            <a:r>
-              <a:rPr lang="en-GB" sz="2000" i="1" dirty="0">
-                <a:latin typeface="Times New Roman" panose="02020603050405020304" pitchFamily="18" charset="0"/>
-                <a:cs typeface="Times New Roman" panose="02020603050405020304" pitchFamily="18" charset="0"/>
-              </a:rPr>
-              <a:t>. Prof. Dr. </a:t>
+              <a:t>Assist. Prof. Dr. </a:t>
             </a:r>
             <a:r>
               <a:rPr sz="2000" b="0" i="1" u="none" dirty="0">
